--- a/2025/LEC/03-2 Метрики анализа ВР.pptx
+++ b/2025/LEC/03-2 Метрики анализа ВР.pptx
@@ -215,7 +215,7 @@
           <a:p>
             <a:fld id="{CDA96C9A-3213-B245-BC64-7E419D14BD9D}" type="datetimeFigureOut">
               <a:rPr lang="ru-RU" smtClean="0"/>
-              <a:t>18.07.2025</a:t>
+              <a:t>25.07.2025</a:t>
             </a:fld>
             <a:endParaRPr lang="ru-RU"/>
           </a:p>
@@ -5409,7 +5409,7 @@
           <a:p>
             <a:fld id="{BEE214BE-636D-8A45-BCA6-8B7ED77AA124}" type="datetime1">
               <a:rPr lang="ru-RU" smtClean="0"/>
-              <a:t>18.07.2025</a:t>
+              <a:t>25.07.2025</a:t>
             </a:fld>
             <a:endParaRPr lang="en-US"/>
           </a:p>
@@ -5579,7 +5579,7 @@
           <a:p>
             <a:fld id="{5855274A-4ED4-0146-A3E9-88EF200B5196}" type="datetime1">
               <a:rPr lang="ru-RU" smtClean="0"/>
-              <a:t>18.07.2025</a:t>
+              <a:t>25.07.2025</a:t>
             </a:fld>
             <a:endParaRPr lang="en-US"/>
           </a:p>
@@ -5759,7 +5759,7 @@
           <a:p>
             <a:fld id="{8A78DFF1-9FDC-144B-973E-B4B4609709DF}" type="datetime1">
               <a:rPr lang="ru-RU" smtClean="0"/>
-              <a:t>18.07.2025</a:t>
+              <a:t>25.07.2025</a:t>
             </a:fld>
             <a:endParaRPr lang="en-US"/>
           </a:p>
@@ -5929,7 +5929,7 @@
           <a:p>
             <a:fld id="{8233A339-F8AE-5C45-BEAE-07EF9DC78B60}" type="datetime1">
               <a:rPr lang="ru-RU" smtClean="0"/>
-              <a:t>18.07.2025</a:t>
+              <a:t>25.07.2025</a:t>
             </a:fld>
             <a:endParaRPr lang="en-US"/>
           </a:p>
@@ -6175,7 +6175,7 @@
           <a:p>
             <a:fld id="{7586FDE4-97E0-CE4A-988C-F30B221290A7}" type="datetime1">
               <a:rPr lang="ru-RU" smtClean="0"/>
-              <a:t>18.07.2025</a:t>
+              <a:t>25.07.2025</a:t>
             </a:fld>
             <a:endParaRPr lang="en-US"/>
           </a:p>
@@ -6407,7 +6407,7 @@
           <a:p>
             <a:fld id="{C36ECE8B-8DEC-154E-9F03-047C8DDA20DC}" type="datetime1">
               <a:rPr lang="ru-RU" smtClean="0"/>
-              <a:t>18.07.2025</a:t>
+              <a:t>25.07.2025</a:t>
             </a:fld>
             <a:endParaRPr lang="en-US"/>
           </a:p>
@@ -6774,7 +6774,7 @@
           <a:p>
             <a:fld id="{440816D5-BDB8-B34B-8ACA-ECBDD12E7321}" type="datetime1">
               <a:rPr lang="ru-RU" smtClean="0"/>
-              <a:t>18.07.2025</a:t>
+              <a:t>25.07.2025</a:t>
             </a:fld>
             <a:endParaRPr lang="en-US"/>
           </a:p>
@@ -6892,7 +6892,7 @@
           <a:p>
             <a:fld id="{8A8C589A-5627-764C-AF96-C1E2F9A00A4D}" type="datetime1">
               <a:rPr lang="ru-RU" smtClean="0"/>
-              <a:t>18.07.2025</a:t>
+              <a:t>25.07.2025</a:t>
             </a:fld>
             <a:endParaRPr lang="en-US"/>
           </a:p>
@@ -6987,7 +6987,7 @@
           <a:p>
             <a:fld id="{603EE0D0-1696-6D4F-B917-4AFB24A74E8B}" type="datetime1">
               <a:rPr lang="ru-RU" smtClean="0"/>
-              <a:t>18.07.2025</a:t>
+              <a:t>25.07.2025</a:t>
             </a:fld>
             <a:endParaRPr lang="en-US"/>
           </a:p>
@@ -7264,7 +7264,7 @@
           <a:p>
             <a:fld id="{13C8A91E-B09B-2240-9AA3-B1D4BCC6296E}" type="datetime1">
               <a:rPr lang="ru-RU" smtClean="0"/>
-              <a:t>18.07.2025</a:t>
+              <a:t>25.07.2025</a:t>
             </a:fld>
             <a:endParaRPr lang="en-US"/>
           </a:p>
@@ -7521,7 +7521,7 @@
           <a:p>
             <a:fld id="{3BE9760E-DA8D-6747-B31E-62858C8727B8}" type="datetime1">
               <a:rPr lang="ru-RU" smtClean="0"/>
-              <a:t>18.07.2025</a:t>
+              <a:t>25.07.2025</a:t>
             </a:fld>
             <a:endParaRPr lang="en-US"/>
           </a:p>
@@ -7734,7 +7734,7 @@
           <a:p>
             <a:fld id="{D31305DF-F750-CC43-967D-51A20925EE94}" type="datetime1">
               <a:rPr lang="ru-RU" smtClean="0"/>
-              <a:t>18.07.2025</a:t>
+              <a:t>25.07.2025</a:t>
             </a:fld>
             <a:endParaRPr lang="en-US"/>
           </a:p>
@@ -17681,8 +17681,8 @@
           <a:chExt cx="0" cy="0"/>
         </a:xfrm>
       </p:grpSpPr>
-      <mc:AlternateContent xmlns:mc="http://schemas.openxmlformats.org/markup-compatibility/2006">
-        <mc:Choice xmlns:a14="http://schemas.microsoft.com/office/drawing/2010/main" Requires="a14">
+      <mc:AlternateContent xmlns:mc="http://schemas.openxmlformats.org/markup-compatibility/2006" xmlns:a14="http://schemas.microsoft.com/office/drawing/2010/main">
+        <mc:Choice Requires="a14">
           <p:sp>
             <p:nvSpPr>
               <p:cNvPr id="3" name="Объект 2"/>
@@ -18699,7 +18699,7 @@
             </p:txBody>
           </p:sp>
         </mc:Choice>
-        <mc:Fallback>
+        <mc:Fallback xmlns="">
           <p:sp>
             <p:nvSpPr>
               <p:cNvPr id="3" name="Объект 2"/>
@@ -26933,8 +26933,8 @@
         </p:nvSpPr>
         <p:spPr>
           <a:xfrm>
-            <a:off x="4252454" y="6293017"/>
-            <a:ext cx="7701739" cy="307777"/>
+            <a:off x="5279830" y="6293017"/>
+            <a:ext cx="6674363" cy="276999"/>
           </a:xfrm>
           <a:prstGeom prst="rect">
             <a:avLst/>
@@ -26947,7 +26947,7 @@
           <a:lstStyle/>
           <a:p>
             <a:r>
-              <a:rPr lang="ru-RU" sz="1400" dirty="0"/>
+              <a:rPr lang="ru-RU" sz="1200" dirty="0"/>
               <a:t>https://medium.com/@sahin.samia/understanding-r-squared-in-regression-analysis-2d8246a63dbb</a:t>
             </a:r>
           </a:p>
@@ -26961,8 +26961,8 @@
         </p:nvSpPr>
         <p:spPr>
           <a:xfrm>
-            <a:off x="210903" y="6519446"/>
-            <a:ext cx="4132991" cy="338554"/>
+            <a:off x="47224" y="6255434"/>
+            <a:ext cx="3142720" cy="276999"/>
           </a:xfrm>
           <a:prstGeom prst="rect">
             <a:avLst/>
@@ -26975,7 +26975,7 @@
           <a:lstStyle/>
           <a:p>
             <a:r>
-              <a:rPr lang="ru-RU" sz="1600" dirty="0"/>
+              <a:rPr lang="ru-RU" sz="1200" dirty="0"/>
               <a:t>https://robjhyndman.com/papers/foresight.pdf</a:t>
             </a:r>
           </a:p>
@@ -26989,8 +26989,8 @@
         </p:nvSpPr>
         <p:spPr>
           <a:xfrm>
-            <a:off x="210903" y="6301526"/>
-            <a:ext cx="3938642" cy="338554"/>
+            <a:off x="50137" y="6431516"/>
+            <a:ext cx="3000501" cy="276999"/>
           </a:xfrm>
           <a:prstGeom prst="rect">
             <a:avLst/>
@@ -27003,7 +27003,7 @@
           <a:lstStyle/>
           <a:p>
             <a:r>
-              <a:rPr lang="ru-RU" sz="1600" dirty="0"/>
+              <a:rPr lang="ru-RU" sz="1200" dirty="0"/>
               <a:t>https://robjhyndman.com/hyndsight/smape/</a:t>
             </a:r>
           </a:p>
@@ -27017,7 +27017,7 @@
         </p:nvSpPr>
         <p:spPr>
           <a:xfrm>
-            <a:off x="5680710" y="6533654"/>
+            <a:off x="6368688" y="6451959"/>
             <a:ext cx="6096000" cy="276999"/>
           </a:xfrm>
           <a:prstGeom prst="rect">
@@ -27067,6 +27067,34 @@
           </a:fontRef>
         </p:style>
       </p:cxnSp>
+      <p:sp>
+        <p:nvSpPr>
+          <p:cNvPr id="5" name="Прямоугольник 4"/>
+          <p:cNvSpPr/>
+          <p:nvPr/>
+        </p:nvSpPr>
+        <p:spPr>
+          <a:xfrm>
+            <a:off x="56878" y="6609303"/>
+            <a:ext cx="7088777" cy="253916"/>
+          </a:xfrm>
+          <a:prstGeom prst="rect">
+            <a:avLst/>
+          </a:prstGeom>
+        </p:spPr>
+        <p:txBody>
+          <a:bodyPr wrap="square">
+            <a:spAutoFit/>
+          </a:bodyPr>
+          <a:lstStyle/>
+          <a:p>
+            <a:r>
+              <a:rPr lang="ru-RU" sz="1050" dirty="0"/>
+              <a:t>https://stats.stackexchange.com/questions/299712/what-are-the-shortcomings-of-the-mean-absolute-percentage-error-mape</a:t>
+            </a:r>
+          </a:p>
+        </p:txBody>
+      </p:sp>
     </p:spTree>
     <p:extLst>
       <p:ext uri="{BB962C8B-B14F-4D97-AF65-F5344CB8AC3E}">

--- a/2025/LEC/03-2 Метрики анализа ВР.pptx
+++ b/2025/LEC/03-2 Метрики анализа ВР.pptx
@@ -215,7 +215,7 @@
           <a:p>
             <a:fld id="{CDA96C9A-3213-B245-BC64-7E419D14BD9D}" type="datetimeFigureOut">
               <a:rPr lang="ru-RU" smtClean="0"/>
-              <a:t>25.07.2025</a:t>
+              <a:t>12.08.2025</a:t>
             </a:fld>
             <a:endParaRPr lang="ru-RU"/>
           </a:p>
@@ -5409,7 +5409,7 @@
           <a:p>
             <a:fld id="{BEE214BE-636D-8A45-BCA6-8B7ED77AA124}" type="datetime1">
               <a:rPr lang="ru-RU" smtClean="0"/>
-              <a:t>25.07.2025</a:t>
+              <a:t>12.08.2025</a:t>
             </a:fld>
             <a:endParaRPr lang="en-US"/>
           </a:p>
@@ -5579,7 +5579,7 @@
           <a:p>
             <a:fld id="{5855274A-4ED4-0146-A3E9-88EF200B5196}" type="datetime1">
               <a:rPr lang="ru-RU" smtClean="0"/>
-              <a:t>25.07.2025</a:t>
+              <a:t>12.08.2025</a:t>
             </a:fld>
             <a:endParaRPr lang="en-US"/>
           </a:p>
@@ -5759,7 +5759,7 @@
           <a:p>
             <a:fld id="{8A78DFF1-9FDC-144B-973E-B4B4609709DF}" type="datetime1">
               <a:rPr lang="ru-RU" smtClean="0"/>
-              <a:t>25.07.2025</a:t>
+              <a:t>12.08.2025</a:t>
             </a:fld>
             <a:endParaRPr lang="en-US"/>
           </a:p>
@@ -5929,7 +5929,7 @@
           <a:p>
             <a:fld id="{8233A339-F8AE-5C45-BEAE-07EF9DC78B60}" type="datetime1">
               <a:rPr lang="ru-RU" smtClean="0"/>
-              <a:t>25.07.2025</a:t>
+              <a:t>12.08.2025</a:t>
             </a:fld>
             <a:endParaRPr lang="en-US"/>
           </a:p>
@@ -6175,7 +6175,7 @@
           <a:p>
             <a:fld id="{7586FDE4-97E0-CE4A-988C-F30B221290A7}" type="datetime1">
               <a:rPr lang="ru-RU" smtClean="0"/>
-              <a:t>25.07.2025</a:t>
+              <a:t>12.08.2025</a:t>
             </a:fld>
             <a:endParaRPr lang="en-US"/>
           </a:p>
@@ -6407,7 +6407,7 @@
           <a:p>
             <a:fld id="{C36ECE8B-8DEC-154E-9F03-047C8DDA20DC}" type="datetime1">
               <a:rPr lang="ru-RU" smtClean="0"/>
-              <a:t>25.07.2025</a:t>
+              <a:t>12.08.2025</a:t>
             </a:fld>
             <a:endParaRPr lang="en-US"/>
           </a:p>
@@ -6774,7 +6774,7 @@
           <a:p>
             <a:fld id="{440816D5-BDB8-B34B-8ACA-ECBDD12E7321}" type="datetime1">
               <a:rPr lang="ru-RU" smtClean="0"/>
-              <a:t>25.07.2025</a:t>
+              <a:t>12.08.2025</a:t>
             </a:fld>
             <a:endParaRPr lang="en-US"/>
           </a:p>
@@ -6892,7 +6892,7 @@
           <a:p>
             <a:fld id="{8A8C589A-5627-764C-AF96-C1E2F9A00A4D}" type="datetime1">
               <a:rPr lang="ru-RU" smtClean="0"/>
-              <a:t>25.07.2025</a:t>
+              <a:t>12.08.2025</a:t>
             </a:fld>
             <a:endParaRPr lang="en-US"/>
           </a:p>
@@ -6987,7 +6987,7 @@
           <a:p>
             <a:fld id="{603EE0D0-1696-6D4F-B917-4AFB24A74E8B}" type="datetime1">
               <a:rPr lang="ru-RU" smtClean="0"/>
-              <a:t>25.07.2025</a:t>
+              <a:t>12.08.2025</a:t>
             </a:fld>
             <a:endParaRPr lang="en-US"/>
           </a:p>
@@ -7264,7 +7264,7 @@
           <a:p>
             <a:fld id="{13C8A91E-B09B-2240-9AA3-B1D4BCC6296E}" type="datetime1">
               <a:rPr lang="ru-RU" smtClean="0"/>
-              <a:t>25.07.2025</a:t>
+              <a:t>12.08.2025</a:t>
             </a:fld>
             <a:endParaRPr lang="en-US"/>
           </a:p>
@@ -7521,7 +7521,7 @@
           <a:p>
             <a:fld id="{3BE9760E-DA8D-6747-B31E-62858C8727B8}" type="datetime1">
               <a:rPr lang="ru-RU" smtClean="0"/>
-              <a:t>25.07.2025</a:t>
+              <a:t>12.08.2025</a:t>
             </a:fld>
             <a:endParaRPr lang="en-US"/>
           </a:p>
@@ -7734,7 +7734,7 @@
           <a:p>
             <a:fld id="{D31305DF-F750-CC43-967D-51A20925EE94}" type="datetime1">
               <a:rPr lang="ru-RU" smtClean="0"/>
-              <a:t>25.07.2025</a:t>
+              <a:t>12.08.2025</a:t>
             </a:fld>
             <a:endParaRPr lang="en-US"/>
           </a:p>
@@ -27907,8 +27907,8 @@
         </p:nvSpPr>
         <p:spPr>
           <a:xfrm>
-            <a:off x="1227130" y="6431096"/>
-            <a:ext cx="4639412" cy="369332"/>
+            <a:off x="0" y="6413698"/>
+            <a:ext cx="3649076" cy="307777"/>
           </a:xfrm>
           <a:prstGeom prst="rect">
             <a:avLst/>
@@ -27921,10 +27921,10 @@
           <a:lstStyle/>
           <a:p>
             <a:r>
-              <a:rPr lang="en-US" dirty="0"/>
+              <a:rPr lang="en-US" sz="1400" dirty="0"/>
               <a:t>https://robjhyndman.com/papers/foresight.pdf</a:t>
             </a:r>
-            <a:endParaRPr lang="ru-RU" dirty="0"/>
+            <a:endParaRPr lang="ru-RU" sz="1400" dirty="0"/>
           </a:p>
         </p:txBody>
       </p:sp>
@@ -30880,6 +30880,30 @@
           </a:fontRef>
         </p:style>
       </p:cxnSp>
+      <p:pic>
+        <p:nvPicPr>
+          <p:cNvPr id="9" name="Рисунок 8"/>
+          <p:cNvPicPr>
+            <a:picLocks noChangeAspect="1"/>
+          </p:cNvPicPr>
+          <p:nvPr/>
+        </p:nvPicPr>
+        <p:blipFill>
+          <a:blip r:embed="rId10"/>
+          <a:stretch>
+            <a:fillRect/>
+          </a:stretch>
+        </p:blipFill>
+        <p:spPr>
+          <a:xfrm>
+            <a:off x="3629385" y="6078292"/>
+            <a:ext cx="3454790" cy="716549"/>
+          </a:xfrm>
+          <a:prstGeom prst="rect">
+            <a:avLst/>
+          </a:prstGeom>
+        </p:spPr>
+      </p:pic>
     </p:spTree>
     <p:extLst>
       <p:ext uri="{BB962C8B-B14F-4D97-AF65-F5344CB8AC3E}">

--- a/2025/LEC/03-2 Метрики анализа ВР.pptx
+++ b/2025/LEC/03-2 Метрики анализа ВР.pptx
@@ -5,7 +5,7 @@
     <p:sldMasterId id="2147483672" r:id="rId1"/>
   </p:sldMasterIdLst>
   <p:notesMasterIdLst>
-    <p:notesMasterId r:id="rId21"/>
+    <p:notesMasterId r:id="rId22"/>
   </p:notesMasterIdLst>
   <p:sldIdLst>
     <p:sldId id="338" r:id="rId2"/>
@@ -27,6 +27,7 @@
     <p:sldId id="424" r:id="rId18"/>
     <p:sldId id="435" r:id="rId19"/>
     <p:sldId id="426" r:id="rId20"/>
+    <p:sldId id="441" r:id="rId21"/>
   </p:sldIdLst>
   <p:sldSz cx="12192000" cy="6858000"/>
   <p:notesSz cx="6858000" cy="9144000"/>
@@ -215,7 +216,7 @@
           <a:p>
             <a:fld id="{CDA96C9A-3213-B245-BC64-7E419D14BD9D}" type="datetimeFigureOut">
               <a:rPr lang="ru-RU" smtClean="0"/>
-              <a:t>12.08.2025</a:t>
+              <a:t>20.08.2025</a:t>
             </a:fld>
             <a:endParaRPr lang="ru-RU"/>
           </a:p>
@@ -5409,7 +5410,7 @@
           <a:p>
             <a:fld id="{BEE214BE-636D-8A45-BCA6-8B7ED77AA124}" type="datetime1">
               <a:rPr lang="ru-RU" smtClean="0"/>
-              <a:t>12.08.2025</a:t>
+              <a:t>20.08.2025</a:t>
             </a:fld>
             <a:endParaRPr lang="en-US"/>
           </a:p>
@@ -5579,7 +5580,7 @@
           <a:p>
             <a:fld id="{5855274A-4ED4-0146-A3E9-88EF200B5196}" type="datetime1">
               <a:rPr lang="ru-RU" smtClean="0"/>
-              <a:t>12.08.2025</a:t>
+              <a:t>20.08.2025</a:t>
             </a:fld>
             <a:endParaRPr lang="en-US"/>
           </a:p>
@@ -5759,7 +5760,7 @@
           <a:p>
             <a:fld id="{8A78DFF1-9FDC-144B-973E-B4B4609709DF}" type="datetime1">
               <a:rPr lang="ru-RU" smtClean="0"/>
-              <a:t>12.08.2025</a:t>
+              <a:t>20.08.2025</a:t>
             </a:fld>
             <a:endParaRPr lang="en-US"/>
           </a:p>
@@ -5929,7 +5930,7 @@
           <a:p>
             <a:fld id="{8233A339-F8AE-5C45-BEAE-07EF9DC78B60}" type="datetime1">
               <a:rPr lang="ru-RU" smtClean="0"/>
-              <a:t>12.08.2025</a:t>
+              <a:t>20.08.2025</a:t>
             </a:fld>
             <a:endParaRPr lang="en-US"/>
           </a:p>
@@ -6175,7 +6176,7 @@
           <a:p>
             <a:fld id="{7586FDE4-97E0-CE4A-988C-F30B221290A7}" type="datetime1">
               <a:rPr lang="ru-RU" smtClean="0"/>
-              <a:t>12.08.2025</a:t>
+              <a:t>20.08.2025</a:t>
             </a:fld>
             <a:endParaRPr lang="en-US"/>
           </a:p>
@@ -6407,7 +6408,7 @@
           <a:p>
             <a:fld id="{C36ECE8B-8DEC-154E-9F03-047C8DDA20DC}" type="datetime1">
               <a:rPr lang="ru-RU" smtClean="0"/>
-              <a:t>12.08.2025</a:t>
+              <a:t>20.08.2025</a:t>
             </a:fld>
             <a:endParaRPr lang="en-US"/>
           </a:p>
@@ -6774,7 +6775,7 @@
           <a:p>
             <a:fld id="{440816D5-BDB8-B34B-8ACA-ECBDD12E7321}" type="datetime1">
               <a:rPr lang="ru-RU" smtClean="0"/>
-              <a:t>12.08.2025</a:t>
+              <a:t>20.08.2025</a:t>
             </a:fld>
             <a:endParaRPr lang="en-US"/>
           </a:p>
@@ -6892,7 +6893,7 @@
           <a:p>
             <a:fld id="{8A8C589A-5627-764C-AF96-C1E2F9A00A4D}" type="datetime1">
               <a:rPr lang="ru-RU" smtClean="0"/>
-              <a:t>12.08.2025</a:t>
+              <a:t>20.08.2025</a:t>
             </a:fld>
             <a:endParaRPr lang="en-US"/>
           </a:p>
@@ -6987,7 +6988,7 @@
           <a:p>
             <a:fld id="{603EE0D0-1696-6D4F-B917-4AFB24A74E8B}" type="datetime1">
               <a:rPr lang="ru-RU" smtClean="0"/>
-              <a:t>12.08.2025</a:t>
+              <a:t>20.08.2025</a:t>
             </a:fld>
             <a:endParaRPr lang="en-US"/>
           </a:p>
@@ -7264,7 +7265,7 @@
           <a:p>
             <a:fld id="{13C8A91E-B09B-2240-9AA3-B1D4BCC6296E}" type="datetime1">
               <a:rPr lang="ru-RU" smtClean="0"/>
-              <a:t>12.08.2025</a:t>
+              <a:t>20.08.2025</a:t>
             </a:fld>
             <a:endParaRPr lang="en-US"/>
           </a:p>
@@ -7521,7 +7522,7 @@
           <a:p>
             <a:fld id="{3BE9760E-DA8D-6747-B31E-62858C8727B8}" type="datetime1">
               <a:rPr lang="ru-RU" smtClean="0"/>
-              <a:t>12.08.2025</a:t>
+              <a:t>20.08.2025</a:t>
             </a:fld>
             <a:endParaRPr lang="en-US"/>
           </a:p>
@@ -7734,7 +7735,7 @@
           <a:p>
             <a:fld id="{D31305DF-F750-CC43-967D-51A20925EE94}" type="datetime1">
               <a:rPr lang="ru-RU" smtClean="0"/>
-              <a:t>12.08.2025</a:t>
+              <a:t>20.08.2025</a:t>
             </a:fld>
             <a:endParaRPr lang="en-US"/>
           </a:p>
@@ -12776,8 +12777,8 @@
           </a:p>
         </p:txBody>
       </p:sp>
-      <mc:AlternateContent xmlns:mc="http://schemas.openxmlformats.org/markup-compatibility/2006" xmlns:a14="http://schemas.microsoft.com/office/drawing/2010/main">
-        <mc:Choice Requires="a14">
+      <mc:AlternateContent xmlns:mc="http://schemas.openxmlformats.org/markup-compatibility/2006">
+        <mc:Choice xmlns:a14="http://schemas.microsoft.com/office/drawing/2010/main" Requires="a14">
           <p:graphicFrame>
             <p:nvGraphicFramePr>
               <p:cNvPr id="6" name="Таблица 5"/>
@@ -12787,14 +12788,14 @@
               <p:nvPr>
                 <p:extLst>
                   <p:ext uri="{D42A27DB-BD31-4B8C-83A1-F6EECF244321}">
-                    <p14:modId xmlns:p14="http://schemas.microsoft.com/office/powerpoint/2010/main" val="1416035911"/>
+                    <p14:modId xmlns:p14="http://schemas.microsoft.com/office/powerpoint/2010/main" val="426219649"/>
                   </p:ext>
                 </p:extLst>
               </p:nvPr>
             </p:nvGraphicFramePr>
             <p:xfrm>
-              <a:off x="310896" y="1652707"/>
-              <a:ext cx="11422095" cy="3200519"/>
+              <a:off x="310896" y="1652705"/>
+              <a:ext cx="11422095" cy="3166944"/>
             </p:xfrm>
             <a:graphic>
               <a:graphicData uri="http://schemas.openxmlformats.org/drawingml/2006/table">
@@ -12808,21 +12809,21 @@
                         </a:ext>
                       </a:extLst>
                     </a:gridCol>
-                    <a:gridCol w="2221172">
+                    <a:gridCol w="2450863">
                       <a:extLst>
                         <a:ext uri="{9D8B030D-6E8A-4147-A177-3AD203B41FA5}">
                           <a16:colId xmlns:a16="http://schemas.microsoft.com/office/drawing/2014/main" val="1803540345"/>
                         </a:ext>
                       </a:extLst>
                     </a:gridCol>
-                    <a:gridCol w="2897759">
+                    <a:gridCol w="2790825">
                       <a:extLst>
                         <a:ext uri="{9D8B030D-6E8A-4147-A177-3AD203B41FA5}">
                           <a16:colId xmlns:a16="http://schemas.microsoft.com/office/drawing/2014/main" val="2317459356"/>
                         </a:ext>
                       </a:extLst>
                     </a:gridCol>
-                    <a:gridCol w="1965533">
+                    <a:gridCol w="1842776">
                       <a:extLst>
                         <a:ext uri="{9D8B030D-6E8A-4147-A177-3AD203B41FA5}">
                           <a16:colId xmlns:a16="http://schemas.microsoft.com/office/drawing/2014/main" val="3472257170"/>
@@ -12837,13 +12838,13 @@
                       </a:extLst>
                     </a:gridCol>
                   </a:tblGrid>
-                  <a:tr h="338915">
+                  <a:tr h="363586">
                     <a:tc>
                       <a:txBody>
                         <a:bodyPr/>
                         <a:lstStyle/>
                         <a:p>
-                          <a:pPr algn="l" fontAlgn="b"/>
+                          <a:pPr algn="ctr" fontAlgn="b"/>
                           <a:r>
                             <a:rPr lang="ru-RU" sz="1800" b="0" i="0" u="none" strike="noStrike" dirty="0">
                               <a:solidFill>
@@ -12900,7 +12901,7 @@
                         <a:bodyPr/>
                         <a:lstStyle/>
                         <a:p>
-                          <a:pPr algn="l" fontAlgn="b"/>
+                          <a:pPr algn="ctr" fontAlgn="b"/>
                           <a:r>
                             <a:rPr lang="ru-RU" sz="1800" b="0" i="0" u="none" strike="noStrike" dirty="0">
                               <a:solidFill>
@@ -12957,7 +12958,7 @@
                         <a:bodyPr/>
                         <a:lstStyle/>
                         <a:p>
-                          <a:pPr algn="l" fontAlgn="b"/>
+                          <a:pPr algn="ctr" fontAlgn="b"/>
                           <a:r>
                             <a:rPr lang="ru-RU" sz="1800" b="0" i="0" u="none" strike="noStrike" dirty="0">
                               <a:solidFill>
@@ -13014,7 +13015,7 @@
                         <a:bodyPr/>
                         <a:lstStyle/>
                         <a:p>
-                          <a:pPr algn="l" fontAlgn="b"/>
+                          <a:pPr algn="ctr" fontAlgn="b"/>
                           <a:r>
                             <a:rPr lang="ru-RU" sz="1800" b="0" i="0" u="none" strike="noStrike" dirty="0">
                               <a:solidFill>
@@ -13071,7 +13072,7 @@
                         <a:bodyPr/>
                         <a:lstStyle/>
                         <a:p>
-                          <a:pPr algn="l" fontAlgn="b"/>
+                          <a:pPr algn="ctr" fontAlgn="b"/>
                           <a:r>
                             <a:rPr lang="ru-RU" sz="1800" b="0" i="0" u="none" strike="noStrike" dirty="0">
                               <a:solidFill>
@@ -13129,13 +13130,13 @@
                       </a:ext>
                     </a:extLst>
                   </a:tr>
-                  <a:tr h="1158073">
+                  <a:tr h="1242373">
                     <a:tc>
                       <a:txBody>
                         <a:bodyPr/>
                         <a:lstStyle/>
                         <a:p>
-                          <a:pPr algn="l" fontAlgn="b"/>
+                          <a:pPr algn="ctr" fontAlgn="b"/>
                           <a:r>
                             <a:rPr lang="ru-RU" sz="1800" b="0" i="0" u="none" strike="noStrike" dirty="0">
                               <a:solidFill>
@@ -13192,7 +13193,7 @@
                         <a:bodyPr/>
                         <a:lstStyle/>
                         <a:p>
-                          <a:pPr algn="l" fontAlgn="b"/>
+                          <a:pPr algn="ctr" fontAlgn="b"/>
                           <a:r>
                             <a:rPr lang="ru-RU" sz="1800" b="0" i="0" u="none" strike="noStrike" dirty="0">
                               <a:solidFill>
@@ -13364,7 +13365,7 @@
                         <a:bodyPr/>
                         <a:lstStyle/>
                         <a:p>
-                          <a:pPr algn="l" fontAlgn="b"/>
+                          <a:pPr algn="ctr" fontAlgn="b"/>
                           <a:r>
                             <a:rPr lang="ru-RU" sz="1800" b="0" i="0" u="none" strike="noStrike" dirty="0">
                               <a:solidFill>
@@ -13441,7 +13442,7 @@
                         <a:bodyPr/>
                         <a:lstStyle/>
                         <a:p>
-                          <a:pPr algn="l" fontAlgn="b"/>
+                          <a:pPr algn="ctr" fontAlgn="b"/>
                           <a:r>
                             <a:rPr lang="en-US" sz="1800" b="0" i="0" u="none" strike="noStrike" dirty="0">
                               <a:solidFill>
@@ -13498,7 +13499,7 @@
                         <a:bodyPr/>
                         <a:lstStyle/>
                         <a:p>
-                          <a:pPr algn="l" fontAlgn="b"/>
+                          <a:pPr algn="ctr" fontAlgn="b"/>
                           <a:r>
                             <a:rPr lang="ru-RU" sz="1800" b="0" i="0" u="none" strike="noStrike" dirty="0">
                               <a:solidFill>
@@ -13563,13 +13564,13 @@
                       </a:ext>
                     </a:extLst>
                   </a:tr>
-                  <a:tr h="871046">
+                  <a:tr h="934452">
                     <a:tc>
                       <a:txBody>
                         <a:bodyPr/>
                         <a:lstStyle/>
                         <a:p>
-                          <a:pPr algn="l" fontAlgn="b"/>
+                          <a:pPr algn="ctr" fontAlgn="b"/>
                           <a:r>
                             <a:rPr lang="ru-RU" sz="1800" b="0" i="0" u="none" strike="noStrike">
                               <a:solidFill>
@@ -13626,7 +13627,7 @@
                         <a:bodyPr/>
                         <a:lstStyle/>
                         <a:p>
-                          <a:pPr algn="l" fontAlgn="b"/>
+                          <a:pPr algn="ctr" fontAlgn="b"/>
                           <a:r>
                             <a:rPr lang="ru-RU" sz="1800" b="0" i="0" u="none" strike="noStrike" dirty="0">
                               <a:solidFill>
@@ -13731,7 +13732,7 @@
                         <a:bodyPr/>
                         <a:lstStyle/>
                         <a:p>
-                          <a:pPr algn="l" fontAlgn="b"/>
+                          <a:pPr algn="ctr" fontAlgn="b"/>
                           <a:r>
                             <a:rPr lang="ru-RU" sz="1800" b="0" i="0" u="none" strike="noStrike" dirty="0">
                               <a:solidFill>
@@ -13788,7 +13789,7 @@
                         <a:bodyPr/>
                         <a:lstStyle/>
                         <a:p>
-                          <a:pPr algn="l" fontAlgn="b"/>
+                          <a:pPr algn="ctr" fontAlgn="b"/>
                           <a:r>
                             <a:rPr lang="en-US" sz="1800" b="0" i="0" u="none" strike="noStrike" dirty="0">
                               <a:solidFill>
@@ -13845,7 +13846,7 @@
                         <a:bodyPr/>
                         <a:lstStyle/>
                         <a:p>
-                          <a:pPr algn="l" fontAlgn="b"/>
+                          <a:pPr algn="ctr" fontAlgn="b"/>
                           <a:r>
                             <a:rPr lang="ru-RU" sz="1800" b="0" i="0" u="none" strike="noStrike" dirty="0">
                               <a:solidFill>
@@ -13920,13 +13921,13 @@
                       </a:ext>
                     </a:extLst>
                   </a:tr>
-                  <a:tr h="584020">
+                  <a:tr h="626533">
                     <a:tc>
                       <a:txBody>
                         <a:bodyPr/>
                         <a:lstStyle/>
                         <a:p>
-                          <a:pPr algn="l" fontAlgn="b"/>
+                          <a:pPr algn="ctr" fontAlgn="b"/>
                           <a:r>
                             <a:rPr lang="ru-RU" sz="1800" b="0" i="0" u="none" strike="noStrike">
                               <a:solidFill>
@@ -13983,7 +13984,7 @@
                         <a:bodyPr/>
                         <a:lstStyle/>
                         <a:p>
-                          <a:pPr algn="l" fontAlgn="b"/>
+                          <a:pPr algn="ctr" fontAlgn="b"/>
                           <a:r>
                             <a:rPr lang="ru-RU" sz="1800" b="0" i="0" u="none" strike="noStrike" dirty="0">
                               <a:solidFill>
@@ -14118,7 +14119,7 @@
                         <a:bodyPr/>
                         <a:lstStyle/>
                         <a:p>
-                          <a:pPr algn="l" fontAlgn="b"/>
+                          <a:pPr algn="ctr" fontAlgn="b"/>
                           <a:r>
                             <a:rPr lang="ru-RU" sz="1800" b="0" i="0" u="none" strike="noStrike">
                               <a:solidFill>
@@ -14175,7 +14176,7 @@
                         <a:bodyPr/>
                         <a:lstStyle/>
                         <a:p>
-                          <a:pPr algn="l" fontAlgn="b"/>
+                          <a:pPr algn="ctr" fontAlgn="b"/>
                           <a:r>
                             <a:rPr lang="en-US" sz="1800" b="0" i="0" u="none" strike="noStrike" dirty="0">
                               <a:solidFill>
@@ -14232,7 +14233,7 @@
                         <a:bodyPr/>
                         <a:lstStyle/>
                         <a:p>
-                          <a:pPr algn="l" fontAlgn="b"/>
+                          <a:pPr algn="ctr" fontAlgn="b"/>
                           <a:r>
                             <a:rPr lang="ru-RU" sz="1800" b="0" i="0" u="none" strike="noStrike" dirty="0">
                               <a:solidFill>
@@ -14312,7 +14313,7 @@
             </a:graphic>
           </p:graphicFrame>
         </mc:Choice>
-        <mc:Fallback xmlns="">
+        <mc:Fallback>
           <p:graphicFrame>
             <p:nvGraphicFramePr>
               <p:cNvPr id="6" name="Таблица 5"/>
@@ -14322,14 +14323,14 @@
               <p:nvPr>
                 <p:extLst>
                   <p:ext uri="{D42A27DB-BD31-4B8C-83A1-F6EECF244321}">
-                    <p14:modId xmlns:p14="http://schemas.microsoft.com/office/powerpoint/2010/main" val="1416035911"/>
+                    <p14:modId xmlns:p14="http://schemas.microsoft.com/office/powerpoint/2010/main" val="426219649"/>
                   </p:ext>
                 </p:extLst>
               </p:nvPr>
             </p:nvGraphicFramePr>
             <p:xfrm>
-              <a:off x="310896" y="1652707"/>
-              <a:ext cx="11422095" cy="3200519"/>
+              <a:off x="310896" y="1652705"/>
+              <a:ext cx="11422095" cy="3166944"/>
             </p:xfrm>
             <a:graphic>
               <a:graphicData uri="http://schemas.openxmlformats.org/drawingml/2006/table">
@@ -14343,21 +14344,21 @@
                         </a:ext>
                       </a:extLst>
                     </a:gridCol>
-                    <a:gridCol w="2221172">
+                    <a:gridCol w="2450863">
                       <a:extLst>
                         <a:ext uri="{9D8B030D-6E8A-4147-A177-3AD203B41FA5}">
                           <a16:colId xmlns:a16="http://schemas.microsoft.com/office/drawing/2014/main" val="1803540345"/>
                         </a:ext>
                       </a:extLst>
                     </a:gridCol>
-                    <a:gridCol w="2897759">
+                    <a:gridCol w="2790825">
                       <a:extLst>
                         <a:ext uri="{9D8B030D-6E8A-4147-A177-3AD203B41FA5}">
                           <a16:colId xmlns:a16="http://schemas.microsoft.com/office/drawing/2014/main" val="2317459356"/>
                         </a:ext>
                       </a:extLst>
                     </a:gridCol>
-                    <a:gridCol w="1965533">
+                    <a:gridCol w="1842776">
                       <a:extLst>
                         <a:ext uri="{9D8B030D-6E8A-4147-A177-3AD203B41FA5}">
                           <a16:colId xmlns:a16="http://schemas.microsoft.com/office/drawing/2014/main" val="3472257170"/>
@@ -14372,13 +14373,13 @@
                       </a:extLst>
                     </a:gridCol>
                   </a:tblGrid>
-                  <a:tr h="338915">
+                  <a:tr h="363586">
                     <a:tc>
                       <a:txBody>
                         <a:bodyPr/>
                         <a:lstStyle/>
                         <a:p>
-                          <a:pPr algn="l" fontAlgn="b"/>
+                          <a:pPr algn="ctr" fontAlgn="b"/>
                           <a:r>
                             <a:rPr lang="ru-RU" sz="1800" b="0" i="0" u="none" strike="noStrike" dirty="0">
                               <a:solidFill>
@@ -14435,9 +14436,9 @@
                         <a:bodyPr/>
                         <a:lstStyle/>
                         <a:p>
-                          <a:pPr algn="l" fontAlgn="b"/>
+                          <a:pPr algn="ctr" fontAlgn="b"/>
                           <a:r>
-                            <a:rPr lang="ru-RU" sz="1800" b="0" i="0" u="none" strike="noStrike" dirty="0" smtClean="0">
+                            <a:rPr lang="ru-RU" sz="1800" b="0" i="0" u="none" strike="noStrike" dirty="0">
                               <a:solidFill>
                                 <a:srgbClr val="000000"/>
                               </a:solidFill>
@@ -14446,13 +14447,6 @@
                             </a:rPr>
                             <a:t>Оценка</a:t>
                           </a:r>
-                          <a:endParaRPr lang="ru-RU" sz="1800" b="0" i="0" u="none" strike="noStrike" dirty="0">
-                            <a:solidFill>
-                              <a:srgbClr val="000000"/>
-                            </a:solidFill>
-                            <a:effectLst/>
-                            <a:latin typeface="Calibri" panose="020F0502020204030204" pitchFamily="34" charset="0"/>
-                          </a:endParaRPr>
                         </a:p>
                       </a:txBody>
                       <a:tcPr marL="9525" marR="9525" marT="9525" marB="0" anchor="ctr">
@@ -14499,9 +14493,9 @@
                         <a:bodyPr/>
                         <a:lstStyle/>
                         <a:p>
-                          <a:pPr algn="l" fontAlgn="b"/>
+                          <a:pPr algn="ctr" fontAlgn="b"/>
                           <a:r>
-                            <a:rPr lang="ru-RU" sz="1800" b="0" i="0" u="none" strike="noStrike" dirty="0" smtClean="0">
+                            <a:rPr lang="ru-RU" sz="1800" b="0" i="0" u="none" strike="noStrike" dirty="0">
                               <a:solidFill>
                                 <a:srgbClr val="000000"/>
                               </a:solidFill>
@@ -14510,13 +14504,6 @@
                             </a:rPr>
                             <a:t>Цель</a:t>
                           </a:r>
-                          <a:endParaRPr lang="ru-RU" sz="1800" b="0" i="0" u="none" strike="noStrike" dirty="0">
-                            <a:solidFill>
-                              <a:srgbClr val="000000"/>
-                            </a:solidFill>
-                            <a:effectLst/>
-                            <a:latin typeface="Calibri" panose="020F0502020204030204" pitchFamily="34" charset="0"/>
-                          </a:endParaRPr>
                         </a:p>
                       </a:txBody>
                       <a:tcPr marL="9525" marR="9525" marT="9525" marB="0" anchor="ctr">
@@ -14563,9 +14550,9 @@
                         <a:bodyPr/>
                         <a:lstStyle/>
                         <a:p>
-                          <a:pPr algn="l" fontAlgn="b"/>
+                          <a:pPr algn="ctr" fontAlgn="b"/>
                           <a:r>
-                            <a:rPr lang="ru-RU" sz="1800" b="0" i="0" u="none" strike="noStrike" dirty="0" smtClean="0">
+                            <a:rPr lang="ru-RU" sz="1800" b="0" i="0" u="none" strike="noStrike" dirty="0">
                               <a:solidFill>
                                 <a:srgbClr val="000000"/>
                               </a:solidFill>
@@ -14574,13 +14561,6 @@
                             </a:rPr>
                             <a:t>Метрики оценки</a:t>
                           </a:r>
-                          <a:endParaRPr lang="ru-RU" sz="1800" b="0" i="0" u="none" strike="noStrike" dirty="0">
-                            <a:solidFill>
-                              <a:srgbClr val="000000"/>
-                            </a:solidFill>
-                            <a:effectLst/>
-                            <a:latin typeface="Calibri" panose="020F0502020204030204" pitchFamily="34" charset="0"/>
-                          </a:endParaRPr>
                         </a:p>
                       </a:txBody>
                       <a:tcPr marL="9525" marR="9525" marT="9525" marB="0" anchor="ctr">
@@ -14627,9 +14607,9 @@
                         <a:bodyPr/>
                         <a:lstStyle/>
                         <a:p>
-                          <a:pPr algn="l" fontAlgn="b"/>
+                          <a:pPr algn="ctr" fontAlgn="b"/>
                           <a:r>
-                            <a:rPr lang="ru-RU" sz="1800" b="0" i="0" u="none" strike="noStrike" dirty="0" smtClean="0">
+                            <a:rPr lang="ru-RU" sz="1800" b="0" i="0" u="none" strike="noStrike" dirty="0">
                               <a:solidFill>
                                 <a:srgbClr val="000000"/>
                               </a:solidFill>
@@ -14638,13 +14618,6 @@
                             </a:rPr>
                             <a:t>Особенности</a:t>
                           </a:r>
-                          <a:endParaRPr lang="ru-RU" sz="1800" b="0" i="0" u="none" strike="noStrike" dirty="0">
-                            <a:solidFill>
-                              <a:srgbClr val="000000"/>
-                            </a:solidFill>
-                            <a:effectLst/>
-                            <a:latin typeface="Calibri" panose="020F0502020204030204" pitchFamily="34" charset="0"/>
-                          </a:endParaRPr>
                         </a:p>
                       </a:txBody>
                       <a:tcPr marL="9525" marR="9525" marT="9525" marB="0" anchor="ctr">
@@ -14692,13 +14665,13 @@
                       </a:ext>
                     </a:extLst>
                   </a:tr>
-                  <a:tr h="1158073">
+                  <a:tr h="1242373">
                     <a:tc>
                       <a:txBody>
                         <a:bodyPr/>
                         <a:lstStyle/>
                         <a:p>
-                          <a:pPr algn="l" fontAlgn="b"/>
+                          <a:pPr algn="ctr" fontAlgn="b"/>
                           <a:r>
                             <a:rPr lang="ru-RU" sz="1800" b="0" i="0" u="none" strike="noStrike" dirty="0">
                               <a:solidFill>
@@ -14798,7 +14771,7 @@
                         <a:blipFill>
                           <a:blip r:embed="rId3"/>
                           <a:stretch>
-                            <a:fillRect l="-69863" t="-33158" r="-344658" b="-155789"/>
+                            <a:fillRect l="-63433" t="-31863" r="-303731" b="-134314"/>
                           </a:stretch>
                         </a:blipFill>
                       </a:tcPr>
@@ -14808,9 +14781,9 @@
                         <a:bodyPr/>
                         <a:lstStyle/>
                         <a:p>
-                          <a:pPr algn="l" fontAlgn="b"/>
+                          <a:pPr algn="ctr" fontAlgn="b"/>
                           <a:r>
-                            <a:rPr lang="ru-RU" sz="1800" b="0" i="0" u="none" strike="noStrike" dirty="0" smtClean="0">
+                            <a:rPr lang="ru-RU" sz="1800" b="0" i="0" u="none" strike="noStrike" dirty="0">
                               <a:solidFill>
                                 <a:srgbClr val="000000"/>
                               </a:solidFill>
@@ -14820,7 +14793,7 @@
                             <a:t>Определить</a:t>
                           </a:r>
                           <a:r>
-                            <a:rPr lang="ru-RU" sz="1800" b="0" i="0" u="none" strike="noStrike" baseline="0" dirty="0" smtClean="0">
+                            <a:rPr lang="ru-RU" sz="1800" b="0" i="0" u="none" strike="noStrike" baseline="0" dirty="0">
                               <a:solidFill>
                                 <a:srgbClr val="000000"/>
                               </a:solidFill>
@@ -14830,16 +14803,6 @@
                             <a:t> ш</a:t>
                           </a:r>
                           <a:r>
-                            <a:rPr lang="ru-RU" sz="1800" b="0" i="0" u="none" strike="noStrike" dirty="0" smtClean="0">
-                              <a:solidFill>
-                                <a:srgbClr val="000000"/>
-                              </a:solidFill>
-                              <a:effectLst/>
-                              <a:latin typeface="Calibri" panose="020F0502020204030204" pitchFamily="34" charset="0"/>
-                            </a:rPr>
-                            <a:t>ирину </a:t>
-                          </a:r>
-                          <a:r>
                             <a:rPr lang="ru-RU" sz="1800" b="0" i="0" u="none" strike="noStrike" dirty="0">
                               <a:solidFill>
                                 <a:srgbClr val="000000"/>
@@ -14847,7 +14810,7 @@
                               <a:effectLst/>
                               <a:latin typeface="Calibri" panose="020F0502020204030204" pitchFamily="34" charset="0"/>
                             </a:rPr>
-                            <a:t>и покрытие интервалов </a:t>
+                            <a:t>ирину и покрытие интервалов </a:t>
                           </a:r>
                         </a:p>
                       </a:txBody>
@@ -14895,9 +14858,9 @@
                         <a:bodyPr/>
                         <a:lstStyle/>
                         <a:p>
-                          <a:pPr algn="l" fontAlgn="b"/>
+                          <a:pPr algn="ctr" fontAlgn="b"/>
                           <a:r>
-                            <a:rPr lang="en-US" sz="1800" b="0" i="0" u="none" strike="noStrike" dirty="0" smtClean="0">
+                            <a:rPr lang="en-US" sz="1800" b="0" i="0" u="none" strike="noStrike" dirty="0">
                               <a:solidFill>
                                 <a:srgbClr val="000000"/>
                               </a:solidFill>
@@ -14906,13 +14869,6 @@
                             </a:rPr>
                             <a:t>Coverage, Mean Width</a:t>
                           </a:r>
-                          <a:endParaRPr lang="en-US" sz="1800" b="0" i="0" u="none" strike="noStrike" dirty="0">
-                            <a:solidFill>
-                              <a:srgbClr val="000000"/>
-                            </a:solidFill>
-                            <a:effectLst/>
-                            <a:latin typeface="Calibri" panose="020F0502020204030204" pitchFamily="34" charset="0"/>
-                          </a:endParaRPr>
                         </a:p>
                       </a:txBody>
                       <a:tcPr marL="9525" marR="9525" marT="9525" marB="0" anchor="ctr">
@@ -14959,9 +14915,9 @@
                         <a:bodyPr/>
                         <a:lstStyle/>
                         <a:p>
-                          <a:pPr algn="l" fontAlgn="b"/>
+                          <a:pPr algn="ctr" fontAlgn="b"/>
                           <a:r>
-                            <a:rPr lang="ru-RU" sz="1800" b="0" i="0" u="none" strike="noStrike" dirty="0" smtClean="0">
+                            <a:rPr lang="ru-RU" sz="1800" b="0" i="0" u="none" strike="noStrike" dirty="0">
                               <a:solidFill>
                                 <a:srgbClr val="000000"/>
                               </a:solidFill>
@@ -15024,13 +14980,13 @@
                       </a:ext>
                     </a:extLst>
                   </a:tr>
-                  <a:tr h="871046">
+                  <a:tr h="934452">
                     <a:tc>
                       <a:txBody>
                         <a:bodyPr/>
                         <a:lstStyle/>
                         <a:p>
-                          <a:pPr algn="l" fontAlgn="b"/>
+                          <a:pPr algn="ctr" fontAlgn="b"/>
                           <a:r>
                             <a:rPr lang="ru-RU" sz="1800" b="0" i="0" u="none" strike="noStrike">
                               <a:solidFill>
@@ -15130,7 +15086,7 @@
                         <a:blipFill>
                           <a:blip r:embed="rId3"/>
                           <a:stretch>
-                            <a:fillRect l="-69863" t="-176923" r="-344658" b="-106993"/>
+                            <a:fillRect l="-63433" t="-175817" r="-303731" b="-79085"/>
                           </a:stretch>
                         </a:blipFill>
                       </a:tcPr>
@@ -15140,7 +15096,7 @@
                         <a:bodyPr/>
                         <a:lstStyle/>
                         <a:p>
-                          <a:pPr algn="l" fontAlgn="b"/>
+                          <a:pPr algn="ctr" fontAlgn="b"/>
                           <a:r>
                             <a:rPr lang="ru-RU" sz="1800" b="0" i="0" u="none" strike="noStrike" dirty="0">
                               <a:solidFill>
@@ -15197,7 +15153,7 @@
                         <a:bodyPr/>
                         <a:lstStyle/>
                         <a:p>
-                          <a:pPr algn="l" fontAlgn="b"/>
+                          <a:pPr algn="ctr" fontAlgn="b"/>
                           <a:r>
                             <a:rPr lang="en-US" sz="1800" b="0" i="0" u="none" strike="noStrike" dirty="0">
                               <a:solidFill>
@@ -15254,9 +15210,9 @@
                         <a:bodyPr/>
                         <a:lstStyle/>
                         <a:p>
-                          <a:pPr algn="l" fontAlgn="b"/>
+                          <a:pPr algn="ctr" fontAlgn="b"/>
                           <a:r>
-                            <a:rPr lang="ru-RU" sz="1800" b="0" i="0" u="none" strike="noStrike" dirty="0" smtClean="0">
+                            <a:rPr lang="ru-RU" sz="1800" b="0" i="0" u="none" strike="noStrike" dirty="0">
                               <a:solidFill>
                                 <a:srgbClr val="000000"/>
                               </a:solidFill>
@@ -15266,7 +15222,7 @@
                             <a:t>Анализ</a:t>
                           </a:r>
                           <a:r>
-                            <a:rPr lang="ru-RU" sz="1800" b="0" i="0" u="none" strike="noStrike" baseline="0" dirty="0" smtClean="0">
+                            <a:rPr lang="ru-RU" sz="1800" b="0" i="0" u="none" strike="noStrike" baseline="0" dirty="0">
                               <a:solidFill>
                                 <a:srgbClr val="000000"/>
                               </a:solidFill>
@@ -15329,13 +15285,13 @@
                       </a:ext>
                     </a:extLst>
                   </a:tr>
-                  <a:tr h="832485">
+                  <a:tr h="626533">
                     <a:tc>
                       <a:txBody>
                         <a:bodyPr/>
                         <a:lstStyle/>
                         <a:p>
-                          <a:pPr algn="l" fontAlgn="b"/>
+                          <a:pPr algn="ctr" fontAlgn="b"/>
                           <a:r>
                             <a:rPr lang="ru-RU" sz="1800" b="0" i="0" u="none" strike="noStrike">
                               <a:solidFill>
@@ -15435,7 +15391,7 @@
                         <a:blipFill>
                           <a:blip r:embed="rId3"/>
                           <a:stretch>
-                            <a:fillRect l="-69863" t="-289051" r="-344658" b="-11679"/>
+                            <a:fillRect l="-63433" t="-409709" r="-303731" b="-17476"/>
                           </a:stretch>
                         </a:blipFill>
                       </a:tcPr>
@@ -15445,7 +15401,7 @@
                         <a:bodyPr/>
                         <a:lstStyle/>
                         <a:p>
-                          <a:pPr algn="l" fontAlgn="b"/>
+                          <a:pPr algn="ctr" fontAlgn="b"/>
                           <a:r>
                             <a:rPr lang="ru-RU" sz="1800" b="0" i="0" u="none" strike="noStrike">
                               <a:solidFill>
@@ -15502,7 +15458,7 @@
                         <a:bodyPr/>
                         <a:lstStyle/>
                         <a:p>
-                          <a:pPr algn="l" fontAlgn="b"/>
+                          <a:pPr algn="ctr" fontAlgn="b"/>
                           <a:r>
                             <a:rPr lang="en-US" sz="1800" b="0" i="0" u="none" strike="noStrike" dirty="0">
                               <a:solidFill>
@@ -15559,9 +15515,9 @@
                         <a:bodyPr/>
                         <a:lstStyle/>
                         <a:p>
-                          <a:pPr algn="l" fontAlgn="b"/>
+                          <a:pPr algn="ctr" fontAlgn="b"/>
                           <a:r>
-                            <a:rPr lang="ru-RU" sz="1800" b="0" i="0" u="none" strike="noStrike" dirty="0" smtClean="0">
+                            <a:rPr lang="ru-RU" sz="1800" b="0" i="0" u="none" strike="noStrike" dirty="0">
                               <a:solidFill>
                                 <a:srgbClr val="000000"/>
                               </a:solidFill>
@@ -15571,7 +15527,7 @@
                             <a:t>Сложная</a:t>
                           </a:r>
                           <a:r>
-                            <a:rPr lang="ru-RU" sz="1800" b="0" i="0" u="none" strike="noStrike" baseline="0" dirty="0" smtClean="0">
+                            <a:rPr lang="ru-RU" sz="1800" b="0" i="0" u="none" strike="noStrike" baseline="0" dirty="0">
                               <a:solidFill>
                                 <a:srgbClr val="000000"/>
                               </a:solidFill>
@@ -21930,6 +21886,181 @@
     <p:extLst>
       <p:ext uri="{BB962C8B-B14F-4D97-AF65-F5344CB8AC3E}">
         <p14:creationId xmlns:p14="http://schemas.microsoft.com/office/powerpoint/2010/main" val="2611345366"/>
+      </p:ext>
+    </p:extLst>
+  </p:cSld>
+  <p:clrMapOvr>
+    <a:masterClrMapping/>
+  </p:clrMapOvr>
+</p:sld>
+</file>
+
+<file path=ppt/slides/slide20.xml><?xml version="1.0" encoding="utf-8"?>
+<p:sld xmlns:a="http://schemas.openxmlformats.org/drawingml/2006/main" xmlns:r="http://schemas.openxmlformats.org/officeDocument/2006/relationships" xmlns:p="http://schemas.openxmlformats.org/presentationml/2006/main">
+  <p:cSld>
+    <p:spTree>
+      <p:nvGrpSpPr>
+        <p:cNvPr id="1" name=""/>
+        <p:cNvGrpSpPr/>
+        <p:nvPr/>
+      </p:nvGrpSpPr>
+      <p:grpSpPr>
+        <a:xfrm>
+          <a:off x="0" y="0"/>
+          <a:ext cx="0" cy="0"/>
+          <a:chOff x="0" y="0"/>
+          <a:chExt cx="0" cy="0"/>
+        </a:xfrm>
+      </p:grpSpPr>
+      <p:sp>
+        <p:nvSpPr>
+          <p:cNvPr id="2" name="Заголовок 1"/>
+          <p:cNvSpPr>
+            <a:spLocks noGrp="1"/>
+          </p:cNvSpPr>
+          <p:nvPr>
+            <p:ph type="title"/>
+          </p:nvPr>
+        </p:nvSpPr>
+        <p:spPr>
+          <a:xfrm>
+            <a:off x="538162" y="119063"/>
+            <a:ext cx="10934700" cy="806450"/>
+          </a:xfrm>
+        </p:spPr>
+        <p:txBody>
+          <a:bodyPr/>
+          <a:lstStyle/>
+          <a:p>
+            <a:pPr algn="ctr"/>
+            <a:r>
+              <a:rPr lang="ru-RU" b="1" dirty="0" smtClean="0"/>
+              <a:t>Вопросы для самоконтроля</a:t>
+            </a:r>
+            <a:endParaRPr lang="ru-RU" b="1" dirty="0"/>
+          </a:p>
+        </p:txBody>
+      </p:sp>
+      <p:sp>
+        <p:nvSpPr>
+          <p:cNvPr id="3" name="Объект 2"/>
+          <p:cNvSpPr>
+            <a:spLocks noGrp="1"/>
+          </p:cNvSpPr>
+          <p:nvPr>
+            <p:ph idx="1"/>
+          </p:nvPr>
+        </p:nvSpPr>
+        <p:spPr>
+          <a:xfrm>
+            <a:off x="238124" y="925513"/>
+            <a:ext cx="11534775" cy="5072063"/>
+          </a:xfrm>
+        </p:spPr>
+        <p:txBody>
+          <a:bodyPr>
+            <a:normAutofit lnSpcReduction="10000"/>
+          </a:bodyPr>
+          <a:lstStyle/>
+          <a:p>
+            <a:pPr lvl="0" algn="just"/>
+            <a:r>
+              <a:rPr lang="ru-RU" dirty="0"/>
+              <a:t>Объясните цель использования </a:t>
+            </a:r>
+            <a:r>
+              <a:rPr lang="ru-RU" dirty="0" smtClean="0"/>
+              <a:t>различных типов </a:t>
+            </a:r>
+            <a:r>
+              <a:rPr lang="ru-RU" dirty="0"/>
+              <a:t>метрик для предсказания ВР. Приведите примеры </a:t>
+            </a:r>
+            <a:r>
+              <a:rPr lang="ru-RU" dirty="0" smtClean="0"/>
+              <a:t>задач</a:t>
+            </a:r>
+            <a:r>
+              <a:rPr lang="en-US" dirty="0" smtClean="0"/>
+              <a:t> </a:t>
+            </a:r>
+            <a:r>
+              <a:rPr lang="ru-RU" dirty="0" smtClean="0"/>
+              <a:t>анализа ВР </a:t>
+            </a:r>
+            <a:r>
+              <a:rPr lang="ru-RU" dirty="0"/>
+              <a:t>где те или иные метрики будут иметь преимущества. </a:t>
+            </a:r>
+            <a:endParaRPr lang="ru-RU" dirty="0" smtClean="0"/>
+          </a:p>
+          <a:p>
+            <a:pPr lvl="0" algn="just"/>
+            <a:r>
+              <a:rPr lang="ru-RU" dirty="0" smtClean="0"/>
+              <a:t>Приведите примеры задач сопоставляя метрики Анализа ВР и выражаемые ими предметные (бизнес) метрики. Объясните как в таком случае использовать набор метрик анализа ВР.</a:t>
+            </a:r>
+          </a:p>
+          <a:p>
+            <a:pPr lvl="0" algn="just"/>
+            <a:r>
+              <a:rPr lang="ru-RU" dirty="0" smtClean="0"/>
+              <a:t>Объясните интерпретацию вероятностных метрик. Приведите </a:t>
+            </a:r>
+            <a:r>
+              <a:rPr lang="ru-RU" dirty="0"/>
+              <a:t>примеры задач где необходимы вероятностные </a:t>
+            </a:r>
+            <a:r>
+              <a:rPr lang="ru-RU" dirty="0" smtClean="0"/>
+              <a:t>метрики. Как вероятностная сущность метрик сопоставляется с бизнес-метриками.</a:t>
+            </a:r>
+          </a:p>
+          <a:p>
+            <a:pPr lvl="0"/>
+            <a:r>
+              <a:rPr lang="ru-RU" dirty="0" smtClean="0"/>
+              <a:t>Приведите пример постановки задачи от бизнес-метрики (целевые и прокси-метрик) до необходимых метрик анализа ВР (дерево метрик). Оцените какие при этом допустимы значения </a:t>
+            </a:r>
+            <a:r>
+              <a:rPr lang="ru-RU" smtClean="0"/>
+              <a:t>метрик анализа </a:t>
+            </a:r>
+            <a:r>
+              <a:rPr lang="ru-RU" dirty="0" smtClean="0"/>
+              <a:t>ВР.</a:t>
+            </a:r>
+            <a:endParaRPr lang="ru-RU" dirty="0"/>
+          </a:p>
+        </p:txBody>
+      </p:sp>
+      <p:sp>
+        <p:nvSpPr>
+          <p:cNvPr id="4" name="Номер слайда 3"/>
+          <p:cNvSpPr>
+            <a:spLocks noGrp="1"/>
+          </p:cNvSpPr>
+          <p:nvPr>
+            <p:ph type="sldNum" sz="quarter" idx="12"/>
+          </p:nvPr>
+        </p:nvSpPr>
+        <p:spPr/>
+        <p:txBody>
+          <a:bodyPr/>
+          <a:lstStyle/>
+          <a:p>
+            <a:fld id="{45C3B737-A709-4ABC-AFE0-A6B067850C48}" type="slidenum">
+              <a:rPr lang="en-US" smtClean="0"/>
+              <a:t>20</a:t>
+            </a:fld>
+            <a:endParaRPr lang="en-US"/>
+          </a:p>
+        </p:txBody>
+      </p:sp>
+    </p:spTree>
+    <p:extLst>
+      <p:ext uri="{BB962C8B-B14F-4D97-AF65-F5344CB8AC3E}">
+        <p14:creationId xmlns:p14="http://schemas.microsoft.com/office/powerpoint/2010/main" val="4094287917"/>
       </p:ext>
     </p:extLst>
   </p:cSld>
